--- a/Chapter One 1448/IT 641_Data Management and Governance/Lecture/1 Data management.pptx
+++ b/Chapter One 1448/IT 641_Data Management and Governance/Lecture/1 Data management.pptx
@@ -291,7 +291,7 @@
           <a:p>
             <a:fld id="{1D8BD707-D9CF-40AE-B4C6-C98DA3205C09}" type="datetimeFigureOut">
               <a:rPr lang="en-US"/>
-              <a:t>9/6/2026</a:t>
+              <a:t>9/19/2026</a:t>
             </a:fld>
             <a:endParaRPr lang="en-US"/>
           </a:p>
@@ -474,7 +474,7 @@
           <a:p>
             <a:fld id="{1D8BD707-D9CF-40AE-B4C6-C98DA3205C09}" type="datetimeFigureOut">
               <a:rPr lang="en-US"/>
-              <a:t>9/6/2026</a:t>
+              <a:t>9/19/2026</a:t>
             </a:fld>
             <a:endParaRPr lang="en-US"/>
           </a:p>
@@ -696,7 +696,7 @@
           <a:p>
             <a:fld id="{1D8BD707-D9CF-40AE-B4C6-C98DA3205C09}" type="datetimeFigureOut">
               <a:rPr lang="en-US"/>
-              <a:t>9/6/2026</a:t>
+              <a:t>9/19/2026</a:t>
             </a:fld>
             <a:endParaRPr lang="en-US"/>
           </a:p>
@@ -852,7 +852,7 @@
           <a:p>
             <a:fld id="{1D8BD707-D9CF-40AE-B4C6-C98DA3205C09}" type="datetimeFigureOut">
               <a:rPr lang="en-US"/>
-              <a:t>9/6/2026</a:t>
+              <a:t>9/19/2026</a:t>
             </a:fld>
             <a:endParaRPr lang="en-US"/>
           </a:p>
@@ -979,7 +979,7 @@
           <a:p>
             <a:fld id="{1D8BD707-D9CF-40AE-B4C6-C98DA3205C09}" type="datetimeFigureOut">
               <a:rPr lang="en-US"/>
-              <a:t>9/6/2026</a:t>
+              <a:t>9/19/2026</a:t>
             </a:fld>
             <a:endParaRPr lang="en-US"/>
           </a:p>
@@ -1192,7 +1192,7 @@
           <a:p>
             <a:fld id="{1D8BD707-D9CF-40AE-B4C6-C98DA3205C09}" type="datetimeFigureOut">
               <a:rPr lang="en-US"/>
-              <a:t>9/6/2026</a:t>
+              <a:t>9/19/2026</a:t>
             </a:fld>
             <a:endParaRPr lang="en-US"/>
           </a:p>
@@ -12703,7 +12703,24 @@
                 <a:latin typeface="Arial"/>
                 <a:cs typeface="Arial"/>
               </a:rPr>
-              <a:t>consists of three components:  </a:t>
+              <a:t>consists of </a:t>
+            </a:r>
+            <a:r>
+              <a:rPr sz="1100" spc="-5" dirty="0">
+                <a:solidFill>
+                  <a:srgbClr val="FF0000"/>
+                </a:solidFill>
+                <a:latin typeface="Arial"/>
+                <a:cs typeface="Arial"/>
+              </a:rPr>
+              <a:t>three</a:t>
+            </a:r>
+            <a:r>
+              <a:rPr sz="1100" spc="-5" dirty="0">
+                <a:latin typeface="Arial"/>
+                <a:cs typeface="Arial"/>
+              </a:rPr>
+              <a:t> components:  </a:t>
             </a:r>
             <a:r>
               <a:rPr sz="1100" spc="-5" dirty="0">
@@ -12736,10 +12753,6 @@
               </a:rPr>
               <a:t>part.</a:t>
             </a:r>
-            <a:endParaRPr sz="1100">
-              <a:latin typeface="Arial"/>
-              <a:cs typeface="Arial"/>
-            </a:endParaRPr>
           </a:p>
           <a:p>
             <a:pPr marL="220979" indent="-116839">
@@ -12779,10 +12792,6 @@
               </a:rPr>
               <a:t>part.</a:t>
             </a:r>
-            <a:endParaRPr sz="1100">
-              <a:latin typeface="Arial"/>
-              <a:cs typeface="Arial"/>
-            </a:endParaRPr>
           </a:p>
           <a:p>
             <a:pPr marL="220979" indent="-116839">
@@ -12850,7 +12859,7 @@
               </a:rPr>
               <a:t>procedural.</a:t>
             </a:r>
-            <a:endParaRPr sz="1100">
+            <a:endParaRPr sz="1100" dirty="0">
               <a:latin typeface="Arial"/>
               <a:cs typeface="Arial"/>
             </a:endParaRPr>
@@ -20837,7 +20846,47 @@
                 <a:effectLst/>
                 <a:latin typeface="Merriweather" panose="00000500000000000000" pitchFamily="2" charset="0"/>
               </a:rPr>
-              <a:t>Data management is the creation and implementation of architectures, policies, and procedures that manage the full data lifecycle needs of an organization. Common elements of data management are:</a:t>
+              <a:t>Data management is the </a:t>
+            </a:r>
+            <a:r>
+              <a:rPr lang="en-US" sz="800" b="0" i="0" dirty="0">
+                <a:solidFill>
+                  <a:srgbClr val="FF0000"/>
+                </a:solidFill>
+                <a:effectLst/>
+                <a:latin typeface="Merriweather" panose="00000500000000000000" pitchFamily="2" charset="0"/>
+              </a:rPr>
+              <a:t>creation</a:t>
+            </a:r>
+            <a:r>
+              <a:rPr lang="en-US" sz="800" b="0" i="0" dirty="0">
+                <a:solidFill>
+                  <a:srgbClr val="333333"/>
+                </a:solidFill>
+                <a:effectLst/>
+                <a:latin typeface="Merriweather" panose="00000500000000000000" pitchFamily="2" charset="0"/>
+              </a:rPr>
+              <a:t> and </a:t>
+            </a:r>
+            <a:r>
+              <a:rPr lang="en-US" sz="800" b="0" i="0" dirty="0">
+                <a:solidFill>
+                  <a:srgbClr val="FF0000"/>
+                </a:solidFill>
+                <a:effectLst/>
+                <a:latin typeface="Merriweather" panose="00000500000000000000" pitchFamily="2" charset="0"/>
+              </a:rPr>
+              <a:t>implementation</a:t>
+            </a:r>
+            <a:r>
+              <a:rPr lang="en-US" sz="800" b="0" i="0" dirty="0">
+                <a:solidFill>
+                  <a:srgbClr val="333333"/>
+                </a:solidFill>
+                <a:effectLst/>
+                <a:latin typeface="Merriweather" panose="00000500000000000000" pitchFamily="2" charset="0"/>
+              </a:rPr>
+              <a:t> of architectures, policies, and procedures that manage the full data lifecycle needs of an organization. Common elements of data management are:</a:t>
             </a:r>
             <a:endParaRPr lang="en-US" sz="800" b="0" i="0" dirty="0">
               <a:solidFill>
@@ -20870,6 +20919,9 @@
                   <a:srgbClr val="333333"/>
                 </a:solidFill>
                 <a:effectLst/>
+                <a:highlight>
+                  <a:srgbClr val="FFFF00"/>
+                </a:highlight>
                 <a:latin typeface="Times New Roman" panose="02020603050405020304" pitchFamily="18" charset="0"/>
                 <a:cs typeface="Times New Roman" panose="02020603050405020304" pitchFamily="18" charset="0"/>
               </a:rPr>
@@ -20884,7 +20936,51 @@
                 <a:latin typeface="Times New Roman" panose="02020603050405020304" pitchFamily="18" charset="0"/>
                 <a:cs typeface="Times New Roman" panose="02020603050405020304" pitchFamily="18" charset="0"/>
               </a:rPr>
-              <a:t>is the process of cleaning and transforming raw data to allow for accurate analysis. This critical first step sometimes gets missed in the rush for reporting and analysis, and organizations find themselves making bad decisions with bad data.</a:t>
+              <a:t>is the process of </a:t>
+            </a:r>
+            <a:r>
+              <a:rPr lang="en-US" sz="800" b="0" i="0" dirty="0">
+                <a:solidFill>
+                  <a:srgbClr val="FF0000"/>
+                </a:solidFill>
+                <a:effectLst/>
+                <a:latin typeface="Times New Roman" panose="02020603050405020304" pitchFamily="18" charset="0"/>
+                <a:cs typeface="Times New Roman" panose="02020603050405020304" pitchFamily="18" charset="0"/>
+              </a:rPr>
+              <a:t>cleaning</a:t>
+            </a:r>
+            <a:r>
+              <a:rPr lang="en-US" sz="800" b="0" i="0" dirty="0">
+                <a:solidFill>
+                  <a:srgbClr val="333333"/>
+                </a:solidFill>
+                <a:effectLst/>
+                <a:latin typeface="Times New Roman" panose="02020603050405020304" pitchFamily="18" charset="0"/>
+                <a:cs typeface="Times New Roman" panose="02020603050405020304" pitchFamily="18" charset="0"/>
+              </a:rPr>
+              <a:t> and </a:t>
+            </a:r>
+            <a:r>
+              <a:rPr lang="en-US" sz="800" b="0" i="0" dirty="0">
+                <a:solidFill>
+                  <a:srgbClr val="FF0000"/>
+                </a:solidFill>
+                <a:effectLst/>
+                <a:latin typeface="Times New Roman" panose="02020603050405020304" pitchFamily="18" charset="0"/>
+                <a:cs typeface="Times New Roman" panose="02020603050405020304" pitchFamily="18" charset="0"/>
+              </a:rPr>
+              <a:t>transforming</a:t>
+            </a:r>
+            <a:r>
+              <a:rPr lang="en-US" sz="800" b="0" i="0" dirty="0">
+                <a:solidFill>
+                  <a:srgbClr val="333333"/>
+                </a:solidFill>
+                <a:effectLst/>
+                <a:latin typeface="Times New Roman" panose="02020603050405020304" pitchFamily="18" charset="0"/>
+                <a:cs typeface="Times New Roman" panose="02020603050405020304" pitchFamily="18" charset="0"/>
+              </a:rPr>
+              <a:t> raw data to allow for accurate analysis. This critical first step sometimes gets missed in the rush for reporting and analysis, and organizations find themselves making bad decisions with bad data.</a:t>
             </a:r>
           </a:p>
           <a:p>
@@ -20909,6 +21005,9 @@
                   <a:srgbClr val="333333"/>
                 </a:solidFill>
                 <a:effectLst/>
+                <a:highlight>
+                  <a:srgbClr val="FFFF00"/>
+                </a:highlight>
                 <a:latin typeface="Times New Roman" panose="02020603050405020304" pitchFamily="18" charset="0"/>
                 <a:cs typeface="Times New Roman" panose="02020603050405020304" pitchFamily="18" charset="0"/>
               </a:rPr>
@@ -20923,7 +21022,29 @@
                 <a:latin typeface="Times New Roman" panose="02020603050405020304" pitchFamily="18" charset="0"/>
                 <a:cs typeface="Times New Roman" panose="02020603050405020304" pitchFamily="18" charset="0"/>
               </a:rPr>
-              <a:t>are used to automatically transfer data from one system to another.</a:t>
+              <a:t>are used to </a:t>
+            </a:r>
+            <a:r>
+              <a:rPr lang="en-US" sz="800" b="0" i="0" dirty="0">
+                <a:solidFill>
+                  <a:srgbClr val="FF0000"/>
+                </a:solidFill>
+                <a:effectLst/>
+                <a:latin typeface="Times New Roman" panose="02020603050405020304" pitchFamily="18" charset="0"/>
+                <a:cs typeface="Times New Roman" panose="02020603050405020304" pitchFamily="18" charset="0"/>
+              </a:rPr>
+              <a:t>automatically transfer </a:t>
+            </a:r>
+            <a:r>
+              <a:rPr lang="en-US" sz="800" b="0" i="0" dirty="0">
+                <a:solidFill>
+                  <a:srgbClr val="333333"/>
+                </a:solidFill>
+                <a:effectLst/>
+                <a:latin typeface="Times New Roman" panose="02020603050405020304" pitchFamily="18" charset="0"/>
+                <a:cs typeface="Times New Roman" panose="02020603050405020304" pitchFamily="18" charset="0"/>
+              </a:rPr>
+              <a:t>data from one system to another.</a:t>
             </a:r>
           </a:p>
           <a:p>
@@ -20948,6 +21069,9 @@
                   <a:srgbClr val="333333"/>
                 </a:solidFill>
                 <a:effectLst/>
+                <a:highlight>
+                  <a:srgbClr val="FFFF00"/>
+                </a:highlight>
                 <a:latin typeface="Times New Roman" panose="02020603050405020304" pitchFamily="18" charset="0"/>
                 <a:cs typeface="Times New Roman" panose="02020603050405020304" pitchFamily="18" charset="0"/>
               </a:rPr>
@@ -20962,7 +21086,29 @@
                 <a:latin typeface="Times New Roman" panose="02020603050405020304" pitchFamily="18" charset="0"/>
                 <a:cs typeface="Times New Roman" panose="02020603050405020304" pitchFamily="18" charset="0"/>
               </a:rPr>
-              <a:t>means transforming data to load in an organization’s data warehouse. ETLs often are automated processes once they are built and usually require preparation and pipeline work.</a:t>
+              <a:t>means transforming data to load in an organization’s data </a:t>
+            </a:r>
+            <a:r>
+              <a:rPr lang="en-US" sz="800" b="0" i="0" dirty="0">
+                <a:solidFill>
+                  <a:srgbClr val="FF0000"/>
+                </a:solidFill>
+                <a:effectLst/>
+                <a:latin typeface="Times New Roman" panose="02020603050405020304" pitchFamily="18" charset="0"/>
+                <a:cs typeface="Times New Roman" panose="02020603050405020304" pitchFamily="18" charset="0"/>
+              </a:rPr>
+              <a:t>warehouse</a:t>
+            </a:r>
+            <a:r>
+              <a:rPr lang="en-US" sz="800" b="0" i="0" dirty="0">
+                <a:solidFill>
+                  <a:srgbClr val="333333"/>
+                </a:solidFill>
+                <a:effectLst/>
+                <a:latin typeface="Times New Roman" panose="02020603050405020304" pitchFamily="18" charset="0"/>
+                <a:cs typeface="Times New Roman" panose="02020603050405020304" pitchFamily="18" charset="0"/>
+              </a:rPr>
+              <a:t>. ETLs often are automated processes once they are built and usually require preparation and pipeline work.</a:t>
             </a:r>
           </a:p>
           <a:p>
@@ -20987,6 +21133,9 @@
                   <a:srgbClr val="333333"/>
                 </a:solidFill>
                 <a:effectLst/>
+                <a:highlight>
+                  <a:srgbClr val="FFFF00"/>
+                </a:highlight>
                 <a:latin typeface="Times New Roman" panose="02020603050405020304" pitchFamily="18" charset="0"/>
                 <a:cs typeface="Times New Roman" panose="02020603050405020304" pitchFamily="18" charset="0"/>
               </a:rPr>
@@ -21001,7 +21150,7 @@
                 <a:latin typeface="Times New Roman" panose="02020603050405020304" pitchFamily="18" charset="0"/>
                 <a:cs typeface="Times New Roman" panose="02020603050405020304" pitchFamily="18" charset="0"/>
               </a:rPr>
-              <a:t>help create a complete picture of the data by managing metadata and also making data easier to find and track.</a:t>
+              <a:t>help create a complete picture of the data by managing metadata and making data easier to find and track.</a:t>
             </a:r>
           </a:p>
           <a:p>
@@ -21026,6 +21175,9 @@
                   <a:srgbClr val="333333"/>
                 </a:solidFill>
                 <a:effectLst/>
+                <a:highlight>
+                  <a:srgbClr val="FFFF00"/>
+                </a:highlight>
                 <a:latin typeface="Times New Roman" panose="02020603050405020304" pitchFamily="18" charset="0"/>
                 <a:cs typeface="Times New Roman" panose="02020603050405020304" pitchFamily="18" charset="0"/>
               </a:rPr>
@@ -21065,6 +21217,9 @@
                   <a:srgbClr val="333333"/>
                 </a:solidFill>
                 <a:effectLst/>
+                <a:highlight>
+                  <a:srgbClr val="FFFF00"/>
+                </a:highlight>
                 <a:latin typeface="Times New Roman" panose="02020603050405020304" pitchFamily="18" charset="0"/>
                 <a:cs typeface="Times New Roman" panose="02020603050405020304" pitchFamily="18" charset="0"/>
               </a:rPr>
@@ -21104,6 +21259,9 @@
                   <a:srgbClr val="333333"/>
                 </a:solidFill>
                 <a:effectLst/>
+                <a:highlight>
+                  <a:srgbClr val="FFFF00"/>
+                </a:highlight>
                 <a:latin typeface="Times New Roman" panose="02020603050405020304" pitchFamily="18" charset="0"/>
                 <a:cs typeface="Times New Roman" panose="02020603050405020304" pitchFamily="18" charset="0"/>
               </a:rPr>
@@ -22396,7 +22554,27 @@
                 <a:effectLst/>
                 <a:latin typeface="Merriweather" panose="00000500000000000000" pitchFamily="2" charset="0"/>
               </a:rPr>
-              <a:t>Data governance is a key component of data management—the practice of managing how the data that is being managed is processed through the organization. Data governance helps answer questions like:</a:t>
+              <a:t>Data governance is a </a:t>
+            </a:r>
+            <a:r>
+              <a:rPr lang="en-US" sz="800" b="0" i="0" dirty="0">
+                <a:solidFill>
+                  <a:srgbClr val="FF0000"/>
+                </a:solidFill>
+                <a:effectLst/>
+                <a:latin typeface="Merriweather" panose="00000500000000000000" pitchFamily="2" charset="0"/>
+              </a:rPr>
+              <a:t>key component </a:t>
+            </a:r>
+            <a:r>
+              <a:rPr lang="en-US" sz="800" b="0" i="0" dirty="0">
+                <a:solidFill>
+                  <a:srgbClr val="333333"/>
+                </a:solidFill>
+                <a:effectLst/>
+                <a:latin typeface="Merriweather" panose="00000500000000000000" pitchFamily="2" charset="0"/>
+              </a:rPr>
+              <a:t>of data management—the practice of managing how the data that is being managed is processed through the organization. Data governance helps answer questions like:</a:t>
             </a:r>
           </a:p>
           <a:p>
@@ -26795,10 +26973,20 @@
             </a:r>
             <a:r>
               <a:rPr sz="1100" spc="-10" dirty="0">
-                <a:latin typeface="Arial"/>
-                <a:cs typeface="Arial"/>
-              </a:rPr>
-              <a:t>software </a:t>
+                <a:solidFill>
+                  <a:srgbClr val="FF0000"/>
+                </a:solidFill>
+                <a:latin typeface="Arial"/>
+                <a:cs typeface="Arial"/>
+              </a:rPr>
+              <a:t>software</a:t>
+            </a:r>
+            <a:r>
+              <a:rPr sz="1100" spc="-10" dirty="0">
+                <a:latin typeface="Arial"/>
+                <a:cs typeface="Arial"/>
+              </a:rPr>
+              <a:t> </a:t>
             </a:r>
             <a:r>
               <a:rPr sz="1100" spc="-5" dirty="0">
@@ -26898,7 +27086,7 @@
               </a:rPr>
               <a:t>time.</a:t>
             </a:r>
-            <a:endParaRPr sz="1100">
+            <a:endParaRPr sz="1100" dirty="0">
               <a:latin typeface="Arial"/>
               <a:cs typeface="Arial"/>
             </a:endParaRPr>
@@ -26975,7 +27163,7 @@
               </a:rPr>
               <a:t>.)</a:t>
             </a:r>
-            <a:endParaRPr sz="1100">
+            <a:endParaRPr sz="1100" dirty="0">
               <a:latin typeface="Arial"/>
               <a:cs typeface="Arial"/>
             </a:endParaRPr>
